--- a/decks/geog-climate-change/geog-climate-change_ch4_mitigation-agreements.pptx
+++ b/decks/geog-climate-change/geog-climate-change_ch4_mitigation-agreements.pptx
@@ -129,30 +129,30 @@
   <p:extLst>
     <p:ext uri="{521415D9-36F7-43E2-AB2F-B90AF26B5E84}">
       <p14:sectionLst xmlns:p14="http://schemas.microsoft.com/office/powerpoint/2010/main">
-        <p14:section name="Opening" id="{acc82f3b-198e-ea65-7546-908a6a5ce5d5}">
+        <p14:section name="Opening" id="{d3a2ad87-968c-fe16-1420-dae29a1f745d}">
           <p14:sldIdLst>
             <p14:sldId id="256"/>
           </p14:sldIdLst>
         </p14:section>
-        <p14:section name="Gate" id="{8b510dd1-8f9c-2ea7-5399-2ff8ad2fa0c0}">
+        <p14:section name="Gate" id="{b58b9bdf-0e7a-541e-d38f-1d20b6a9560a}">
           <p14:sldIdLst>
             <p14:sldId id="257"/>
             <p14:sldId id="258"/>
           </p14:sldIdLst>
         </p14:section>
-        <p14:section name="Pre-teach" id="{6f12e867-3123-8567-3aee-a81cf694bf9e}">
+        <p14:section name="Pre-teach" id="{a109b655-b307-f9b3-4ce7-a1a1d4eba7da}">
           <p14:sldIdLst>
             <p14:sldId id="259"/>
             <p14:sldId id="260"/>
           </p14:sldIdLst>
         </p14:section>
-        <p14:section name="Read-along" id="{a56967b0-6932-10ca-de9a-c2908985c856}">
+        <p14:section name="Read-along" id="{e8ef003c-c95e-e29c-af14-878a5857d4af}">
           <p14:sldIdLst>
             <p14:sldId id="261"/>
             <p14:sldId id="262"/>
           </p14:sldIdLst>
         </p14:section>
-        <p14:section name="Teach" id="{c627d56f-6348-086a-9c9c-c9b137413a66}">
+        <p14:section name="Teach" id="{042ca52b-5887-72cb-8aa5-e42a56443a1d}">
           <p14:sldIdLst>
             <p14:sldId id="263"/>
             <p14:sldId id="264"/>
@@ -164,7 +164,7 @@
             <p14:sldId id="270"/>
           </p14:sldIdLst>
         </p14:section>
-        <p14:section name="Routes" id="{3b4adadd-c3ef-5730-acae-6059f18a88a1}">
+        <p14:section name="Routes" id="{33d62c46-d6e7-fc0c-c36d-08096a604316}">
           <p14:sldIdLst>
             <p14:sldId id="271"/>
             <p14:sldId id="272"/>
@@ -172,12 +172,12 @@
             <p14:sldId id="274"/>
           </p14:sldIdLst>
         </p14:section>
-        <p14:section name="Close" id="{5c3df3a9-9694-ef4e-d1ef-2a2b4c08ee82}">
+        <p14:section name="Close" id="{7a0015d0-3acb-f605-3a4f-c5b58b186359}">
           <p14:sldIdLst>
             <p14:sldId id="275"/>
           </p14:sldIdLst>
         </p14:section>
-        <p14:section name="Answers" id="{38a49e6e-a1f8-6603-6511-4abfc28b235e}">
+        <p14:section name="Answers" id="{ca88f6bb-06e9-e5ae-9322-aa9299fcf94a}">
           <p14:sldIdLst>
             <p14:sldId id="276"/>
             <p14:sldId id="277"/>
@@ -1053,8 +1053,8 @@
               <a:rPr lang="en-US" dirty="0"/>
               <a:t>Teach — Kyoto, Copenhagen and Paris. Say it in your own words, then check understanding with a quick question: ask a pupil from the pre-teach group first, since they met these words and ideas before the lesson. Pupils try to recall before you re-explain.
 The Kyoto Protocol, 1997. At Kyoto in Japan, 162 countries including the UK agreed to cut their carbon emissions. The target was to bring emissions down by an average of 5.2% below 1990 levels by 2012. It was the first agreement with binding targets, but not every major emitter took part, and the target was small.
-The Copenhagen agreement, 2009. At Copenhagen in Denmark, 183 countries including the UK agreed to cut carbon emissions in order to limit the rise in global temperatures to 2°C, to help developing nations cope with the impacts of climate change, and to explore carbon markets and carbon trading, in which permission to emit can be bought and sold so that cuts are made where they are cheapest.
-The Paris agreement, 2015. At the United Nations conference in Paris, 194 countries including the UK agreed to keep the rise in global temperatures to below 2.0°C; to limit the greenhouse gases emitted by human activity to the levels that trees, soil and oceans can absorb naturally; and for richer countries to help poorer nations with climate finance, so they can adapt to climate change and switch to renewable energy. The stretch task in your deck asked you to add COP 26, the conference held in 2021, to your notes: its location, its date, why it was needed and what was agreed.
+The Copenhagen agreement, 2009. At Copenhagen in Denmark, 183 countries, the UK among them, promised to bring their carbon emissions down so that global temperature would climb no more than 2°C, to help developing nations cope with the impacts of climate change, and to explore carbon markets and carbon trading, in which permission to emit can be bought and sold so that cuts are made where they are cheapest.
+The Paris agreement, 2015. At the United Nations conference in Paris, 194 countries, the UK among them, promised to hold the warming of the planet to below 2.0°C; to limit the greenhouse gases emitted by human activity to the levels that trees, soil and oceans can absorb naturally; and for richer countries to help poorer nations with climate finance, so they can adapt to climate change and switch to renewable energy. The stretch task in your deck asked you to add COP 26, the conference held in 2021, to your notes: its location, its date, why it was needed and what was agreed.
 Tip: Three agreements, three dates, three country counts: Kyoto 1997 and 162; Copenhagen 2009 and 183; Paris 2015 and 194. The numbers rise each time, which is itself a point you can make.</a:t>
             </a:r>
             <a:endParaRPr lang="en-US" dirty="0"/>
@@ -6099,11 +6099,11 @@
         <p:spPr>
           <a:xfrm>
             <a:off x="548640" y="1389888"/>
-            <a:ext cx="11094415" cy="1258570"/>
+            <a:ext cx="11094415" cy="1088136"/>
           </a:xfrm>
           <a:prstGeom prst="roundRect">
             <a:avLst>
-              <a:gd name="adj" fmla="val 5812"/>
+              <a:gd name="adj" fmla="val 6723"/>
             </a:avLst>
           </a:prstGeom>
           <a:solidFill>
@@ -6120,7 +6120,7 @@
         </p:nvSpPr>
         <p:spPr>
           <a:xfrm>
-            <a:off x="676656" y="1852880"/>
+            <a:off x="676656" y="1767663"/>
             <a:ext cx="384048" cy="332586"/>
           </a:xfrm>
           <a:prstGeom prst="hexagon">
@@ -6141,7 +6141,7 @@
         <p:spPr>
           <a:xfrm>
             <a:off x="1143000" y="1389888"/>
-            <a:ext cx="10408615" cy="1258570"/>
+            <a:ext cx="10408615" cy="1088136"/>
           </a:xfrm>
           <a:prstGeom prst="rect">
             <a:avLst/>
@@ -6179,12 +6179,12 @@
         </p:nvSpPr>
         <p:spPr>
           <a:xfrm>
-            <a:off x="548640" y="2794762"/>
-            <a:ext cx="11094415" cy="2281174"/>
+            <a:off x="548640" y="2624328"/>
+            <a:ext cx="11094415" cy="2451608"/>
           </a:xfrm>
           <a:prstGeom prst="roundRect">
             <a:avLst>
-              <a:gd name="adj" fmla="val 3207"/>
+              <a:gd name="adj" fmla="val 2984"/>
             </a:avLst>
           </a:prstGeom>
           <a:solidFill>
@@ -6201,7 +6201,7 @@
         </p:nvSpPr>
         <p:spPr>
           <a:xfrm>
-            <a:off x="676656" y="3769056"/>
+            <a:off x="676656" y="3683839"/>
             <a:ext cx="384048" cy="332586"/>
           </a:xfrm>
           <a:prstGeom prst="hexagon">
@@ -6221,8 +6221,8 @@
         </p:nvSpPr>
         <p:spPr>
           <a:xfrm>
-            <a:off x="1143000" y="2794762"/>
-            <a:ext cx="10408615" cy="2281174"/>
+            <a:off x="1143000" y="2624328"/>
+            <a:ext cx="10408615" cy="2451608"/>
           </a:xfrm>
           <a:prstGeom prst="rect">
             <a:avLst/>
@@ -6246,7 +6246,7 @@
                 <a:ea typeface="Calibri" pitchFamily="34" charset="-122"/>
                 <a:cs typeface="Calibri" pitchFamily="34" charset="-120"/>
               </a:rPr>
-              <a:t>The Copenhagen agreement, 2009. At Copenhagen in Denmark, 183 countries including the UK agreed to cut carbon emissions in order to limit the rise in global temperatures to 2°C, to help developing nations cope with the impacts of climate change, and to explore carbon markets and carbon trading, in which permission to emit can be bought and sold so that cuts are made where they are cheapest.</a:t>
+              <a:t>The Copenhagen agreement, 2009. At Copenhagen in Denmark, 183 countries, the UK among them, promised to bring their carbon emissions down so that global temperature would climb no more than 2°C, to help developing nations cope with the impacts of climate change, and to explore carbon markets and carbon trading, in which permission to emit can be bought and sold so that cuts are made where they are cheapest.</a:t>
             </a:r>
             <a:endParaRPr lang="en-US" sz="2200" dirty="0"/>
           </a:p>
